--- a/docs/tugas/UTS_Slide_Kelompok6_A11.4502.pptx
+++ b/docs/tugas/UTS_Slide_Kelompok6_A11.4502.pptx
@@ -1130,7 +1130,7 @@
           <a:p>
             <a:r>
               <a:rPr lang="en-US" dirty="0"/>
-              <a:t>Data (±1,5 menit). Riwayat satu akun terlalu sedikit untuk melatih model, jadi data latih memakai simulasi Monte Carlo dari model Markov, 400 akun. Data asli dua akun dipakai khusus untuk menguji. Jelaskan cara pengambilan data asli lewat script PowerShell yang hanya membaca cache game, dan bahwa authkey tidak disimpan.</a:t>
+              <a:t>Data (±1,5 menit). Riwayat satu akun terlalu sedikit untuk melatih model, jadi data latih memakai simulasi Monte Carlo dari model Markov, 400 akun. Data asli dua akun, 1.424 baris, sudah memenuhi syarat dataset tabel minimal 500 sampai 1000 baris. Data asli dipakai untuk menguji, dan di eksperimen kedua keenam algoritma juga dilatih dan diuji hanya dengan data asli. Jelaskan cara pengambilan data asli lewat script PowerShell yang hanya membaca cache game, dan bahwa authkey tidak disimpan.</a:t>
             </a:r>
             <a:endParaRPr lang="en-US" dirty="0"/>
           </a:p>
@@ -1306,7 +1306,7 @@
           <a:p>
             <a:r>
               <a:rPr lang="en-US" dirty="0"/>
-              <a:t>Skenario evaluasi (±1 menit). Pembagian data per akun mencegah kebocoran, karena pull yang berurutan saling berkaitan. Cross-validation lima fold untuk hasil yang stabil, lalu uji akhir di data asli.</a:t>
+              <a:t>Skenario evaluasi (±1 menit). Pembagian data per akun mencegah kebocoran, karena pull yang berurutan saling berkaitan. Cross-validation lima fold untuk hasil yang stabil, lalu uji akhir di data asli. Eksperimen keempat: semua algoritma dilatih dan diuji hanya dengan data asli, 1.192 baris, dibagi per siklus pity menjadi 5 bagian, supaya hasil tidak bergantung pada data simulasi.</a:t>
             </a:r>
             <a:endParaRPr lang="en-US" dirty="0"/>
           </a:p>
@@ -1482,7 +1482,7 @@
           <a:p>
             <a:r>
               <a:rPr lang="en-US" dirty="0"/>
-              <a:t>Hasil awal (±2 menit). Prototipe sudah berjalan dan bisa dibuka di HP. Validasi: pity akun asli 70 dari 90 dan 46 dari 80 sama persis dengan di game. Hasil awal tugas B: model pohon dan KNN sekitar 91 persen di simulasi dan 93 persen di data asli, Logistic Regression dan Naive Bayes lebih rendah. Hasil lengkap akan dibahas di laporan akhir.</a:t>
+              <a:t>Hasil awal (±2 menit). Prototipe sudah berjalan dan bisa dibuka di HP. Validasi: pity akun asli 70 dari 90 dan 46 dari 80 sama persis dengan di game. Hasil awal tugas B: model pohon dan KNN sekitar 91 persen di simulasi dan 93 persen di data asli, Logistic Regression dan Naive Bayes lebih rendah. Eksperimen latih dan uji dengan data asli saja, 1.192 baris, juga sudah dilakukan: Decision Tree tetap tertinggi sekitar 93 persen. Hasil lengkap akan dibahas di laporan akhir.</a:t>
             </a:r>
             <a:endParaRPr lang="en-US" dirty="0"/>
           </a:p>
@@ -4755,7 +4755,7 @@
                 <a:ea typeface="Calibri" pitchFamily="34" charset="-122"/>
                 <a:cs typeface="Calibri" pitchFamily="34" charset="-120"/>
               </a:rPr>
-              <a:t>1.424 pull · 21 S-Rank · anonim (tanpa UID, nama item, waktu). Hanya untuk menguji, tidak untuk melatih.</a:t>
+              <a:t>1.424 pull · 21 S-Rank · anonim. Dipakai untuk menguji model, dan dalam eksperimen kedua untuk melatih + menguji sendiri (1.192 baris).</a:t>
             </a:r>
             <a:endParaRPr lang="en-US" sz="1600" dirty="0"/>
           </a:p>
@@ -6245,11 +6245,11 @@
         <p:spPr>
           <a:xfrm>
             <a:off x="548640" y="1828800"/>
-            <a:ext cx="3566160" cy="2743200"/>
+            <a:ext cx="2624328" cy="2926080"/>
           </a:xfrm>
           <a:prstGeom prst="roundRect">
             <a:avLst>
-              <a:gd name="adj" fmla="val 2667"/>
+              <a:gd name="adj" fmla="val 2787"/>
             </a:avLst>
           </a:prstGeom>
           <a:solidFill>
@@ -6331,7 +6331,7 @@
         <p:spPr>
           <a:xfrm>
             <a:off x="777240" y="2651760"/>
-            <a:ext cx="3108960" cy="731520"/>
+            <a:ext cx="2167128" cy="731520"/>
           </a:xfrm>
           <a:prstGeom prst="rect">
             <a:avLst/>
@@ -6370,7 +6370,7 @@
         <p:spPr>
           <a:xfrm>
             <a:off x="777240" y="3429000"/>
-            <a:ext cx="3108960" cy="960120"/>
+            <a:ext cx="2167128" cy="1143000"/>
           </a:xfrm>
           <a:prstGeom prst="rect">
             <a:avLst/>
@@ -6389,7 +6389,7 @@
               <a:buNone/>
             </a:pPr>
             <a:r>
-              <a:rPr lang="en-US" sz="1600" dirty="0">
+              <a:rPr lang="en-US" sz="1500" dirty="0">
                 <a:solidFill>
                   <a:srgbClr val="A9B4C2"/>
                 </a:solidFill>
@@ -6399,7 +6399,7 @@
               </a:rPr>
               <a:t>Pull dari satu akun tidak boleh ada di data latih dan uji sekaligus.</a:t>
             </a:r>
-            <a:endParaRPr lang="en-US" sz="1600" dirty="0"/>
+            <a:endParaRPr lang="en-US" sz="1500" dirty="0"/>
           </a:p>
         </p:txBody>
       </p:sp>
@@ -6411,12 +6411,12 @@
         </p:nvSpPr>
         <p:spPr>
           <a:xfrm>
-            <a:off x="4297680" y="1828800"/>
-            <a:ext cx="3566160" cy="2743200"/>
+            <a:off x="3355848" y="1828800"/>
+            <a:ext cx="2624328" cy="2926080"/>
           </a:xfrm>
           <a:prstGeom prst="roundRect">
             <a:avLst>
-              <a:gd name="adj" fmla="val 2667"/>
+              <a:gd name="adj" fmla="val 2787"/>
             </a:avLst>
           </a:prstGeom>
           <a:solidFill>
@@ -6438,7 +6438,7 @@
         </p:nvSpPr>
         <p:spPr>
           <a:xfrm>
-            <a:off x="4526280" y="2057400"/>
+            <a:off x="3584448" y="2057400"/>
             <a:ext cx="457200" cy="457200"/>
           </a:xfrm>
           <a:prstGeom prst="ellipse">
@@ -6458,7 +6458,7 @@
         </p:nvSpPr>
         <p:spPr>
           <a:xfrm>
-            <a:off x="4526280" y="2057400"/>
+            <a:off x="3584448" y="2057400"/>
             <a:ext cx="457200" cy="457200"/>
           </a:xfrm>
           <a:prstGeom prst="rect">
@@ -6497,8 +6497,8 @@
         </p:nvSpPr>
         <p:spPr>
           <a:xfrm>
-            <a:off x="4526280" y="2651760"/>
-            <a:ext cx="3108960" cy="731520"/>
+            <a:off x="3584448" y="2651760"/>
+            <a:ext cx="2167128" cy="731520"/>
           </a:xfrm>
           <a:prstGeom prst="rect">
             <a:avLst/>
@@ -6536,8 +6536,8 @@
         </p:nvSpPr>
         <p:spPr>
           <a:xfrm>
-            <a:off x="4526280" y="3429000"/>
-            <a:ext cx="3108960" cy="960120"/>
+            <a:off x="3584448" y="3429000"/>
+            <a:ext cx="2167128" cy="1143000"/>
           </a:xfrm>
           <a:prstGeom prst="rect">
             <a:avLst/>
@@ -6556,7 +6556,7 @@
               <a:buNone/>
             </a:pPr>
             <a:r>
-              <a:rPr lang="en-US" sz="1600" dirty="0">
+              <a:rPr lang="en-US" sz="1500" dirty="0">
                 <a:solidFill>
                   <a:srgbClr val="A9B4C2"/>
                 </a:solidFill>
@@ -6566,7 +6566,7 @@
               </a:rPr>
               <a:t>Rata-rata ± simpangan baku dari 5 percobaan.</a:t>
             </a:r>
-            <a:endParaRPr lang="en-US" sz="1600" dirty="0"/>
+            <a:endParaRPr lang="en-US" sz="1500" dirty="0"/>
           </a:p>
         </p:txBody>
       </p:sp>
@@ -6578,12 +6578,12 @@
         </p:nvSpPr>
         <p:spPr>
           <a:xfrm>
-            <a:off x="8046720" y="1828800"/>
-            <a:ext cx="3566160" cy="2743200"/>
+            <a:off x="6163056" y="1828800"/>
+            <a:ext cx="2624328" cy="2926080"/>
           </a:xfrm>
           <a:prstGeom prst="roundRect">
             <a:avLst>
-              <a:gd name="adj" fmla="val 2667"/>
+              <a:gd name="adj" fmla="val 2787"/>
             </a:avLst>
           </a:prstGeom>
           <a:solidFill>
@@ -6605,7 +6605,7 @@
         </p:nvSpPr>
         <p:spPr>
           <a:xfrm>
-            <a:off x="8275320" y="2057400"/>
+            <a:off x="6391656" y="2057400"/>
             <a:ext cx="457200" cy="457200"/>
           </a:xfrm>
           <a:prstGeom prst="ellipse">
@@ -6625,7 +6625,7 @@
         </p:nvSpPr>
         <p:spPr>
           <a:xfrm>
-            <a:off x="8275320" y="2057400"/>
+            <a:off x="6391656" y="2057400"/>
             <a:ext cx="457200" cy="457200"/>
           </a:xfrm>
           <a:prstGeom prst="rect">
@@ -6664,8 +6664,8 @@
         </p:nvSpPr>
         <p:spPr>
           <a:xfrm>
-            <a:off x="8275320" y="2651760"/>
-            <a:ext cx="3108960" cy="731520"/>
+            <a:off x="6391656" y="2651760"/>
+            <a:ext cx="2167128" cy="731520"/>
           </a:xfrm>
           <a:prstGeom prst="rect">
             <a:avLst/>
@@ -6703,8 +6703,8 @@
         </p:nvSpPr>
         <p:spPr>
           <a:xfrm>
-            <a:off x="8275320" y="3429000"/>
-            <a:ext cx="3108960" cy="960120"/>
+            <a:off x="6391656" y="3429000"/>
+            <a:ext cx="2167128" cy="1143000"/>
           </a:xfrm>
           <a:prstGeom prst="rect">
             <a:avLst/>
@@ -6723,7 +6723,7 @@
               <a:buNone/>
             </a:pPr>
             <a:r>
-              <a:rPr lang="en-US" sz="1600" dirty="0">
+              <a:rPr lang="en-US" sz="1500" dirty="0">
                 <a:solidFill>
                   <a:srgbClr val="A9B4C2"/>
                 </a:solidFill>
@@ -6733,13 +6733,180 @@
               </a:rPr>
               <a:t>Model diuji di 2 akun asli yang tidak pernah dilihat saat latih.</a:t>
             </a:r>
+            <a:endParaRPr lang="en-US" sz="1500" dirty="0"/>
+          </a:p>
+        </p:txBody>
+      </p:sp>
+      <p:sp>
+        <p:nvSpPr>
+          <p:cNvPr id="21" name="Shape 19"/>
+          <p:cNvSpPr/>
+          <p:nvPr/>
+        </p:nvSpPr>
+        <p:spPr>
+          <a:xfrm>
+            <a:off x="8970264" y="1828800"/>
+            <a:ext cx="2624328" cy="2926080"/>
+          </a:xfrm>
+          <a:prstGeom prst="roundRect">
+            <a:avLst>
+              <a:gd name="adj" fmla="val 2787"/>
+            </a:avLst>
+          </a:prstGeom>
+          <a:solidFill>
+            <a:srgbClr val="1C2230"/>
+          </a:solidFill>
+          <a:ln w="9525">
+            <a:solidFill>
+              <a:srgbClr val="30363D"/>
+            </a:solidFill>
+            <a:prstDash val="solid"/>
+          </a:ln>
+        </p:spPr>
+      </p:sp>
+      <p:sp>
+        <p:nvSpPr>
+          <p:cNvPr id="22" name="Shape 20"/>
+          <p:cNvSpPr/>
+          <p:nvPr/>
+        </p:nvSpPr>
+        <p:spPr>
+          <a:xfrm>
+            <a:off x="9198864" y="2057400"/>
+            <a:ext cx="457200" cy="457200"/>
+          </a:xfrm>
+          <a:prstGeom prst="ellipse">
+            <a:avLst/>
+          </a:prstGeom>
+          <a:solidFill>
+            <a:srgbClr val="BC8CFF"/>
+          </a:solidFill>
+          <a:ln/>
+        </p:spPr>
+      </p:sp>
+      <p:sp>
+        <p:nvSpPr>
+          <p:cNvPr id="23" name="Text 21"/>
+          <p:cNvSpPr txBox="1"/>
+          <p:nvPr/>
+        </p:nvSpPr>
+        <p:spPr>
+          <a:xfrm>
+            <a:off x="9198864" y="2057400"/>
+            <a:ext cx="457200" cy="457200"/>
+          </a:xfrm>
+          <a:prstGeom prst="rect">
+            <a:avLst/>
+          </a:prstGeom>
+          <a:noFill/>
+          <a:ln/>
+        </p:spPr>
+        <p:txBody>
+          <a:bodyPr wrap="square" lIns="0" tIns="0" rIns="0" bIns="0" rtlCol="0" anchor="ctr"/>
+          <a:lstStyle/>
+          <a:p>
+            <a:pPr algn="ctr" indent="0" marL="0">
+              <a:buNone/>
+            </a:pPr>
+            <a:r>
+              <a:rPr lang="en-US" sz="1600" b="1" dirty="0">
+                <a:solidFill>
+                  <a:srgbClr val="0E1117"/>
+                </a:solidFill>
+                <a:latin typeface="Calibri" pitchFamily="34" charset="0"/>
+                <a:ea typeface="Calibri" pitchFamily="34" charset="-122"/>
+                <a:cs typeface="Calibri" pitchFamily="34" charset="-120"/>
+              </a:rPr>
+              <a:t>4</a:t>
+            </a:r>
             <a:endParaRPr lang="en-US" sz="1600" dirty="0"/>
           </a:p>
         </p:txBody>
       </p:sp>
       <p:sp>
         <p:nvSpPr>
-          <p:cNvPr id="21" name="Text 19"/>
+          <p:cNvPr id="24" name="Text 22"/>
+          <p:cNvSpPr txBox="1"/>
+          <p:nvPr/>
+        </p:nvSpPr>
+        <p:spPr>
+          <a:xfrm>
+            <a:off x="9198864" y="2651760"/>
+            <a:ext cx="2167128" cy="731520"/>
+          </a:xfrm>
+          <a:prstGeom prst="rect">
+            <a:avLst/>
+          </a:prstGeom>
+          <a:noFill/>
+          <a:ln/>
+        </p:spPr>
+        <p:txBody>
+          <a:bodyPr wrap="square" lIns="0" tIns="0" rIns="0" bIns="0" rtlCol="0" anchor="t"/>
+          <a:lstStyle/>
+          <a:p>
+            <a:pPr indent="0" marL="0">
+              <a:buNone/>
+            </a:pPr>
+            <a:r>
+              <a:rPr lang="en-US" sz="1800" b="1" dirty="0">
+                <a:solidFill>
+                  <a:srgbClr val="E6EDF3"/>
+                </a:solidFill>
+                <a:latin typeface="Cambria" pitchFamily="34" charset="0"/>
+                <a:ea typeface="Cambria" pitchFamily="34" charset="-122"/>
+                <a:cs typeface="Cambria" pitchFamily="34" charset="-120"/>
+              </a:rPr>
+              <a:t>Latih di data asli</a:t>
+            </a:r>
+            <a:endParaRPr lang="en-US" sz="1800" dirty="0"/>
+          </a:p>
+        </p:txBody>
+      </p:sp>
+      <p:sp>
+        <p:nvSpPr>
+          <p:cNvPr id="25" name="Text 23"/>
+          <p:cNvSpPr txBox="1"/>
+          <p:nvPr/>
+        </p:nvSpPr>
+        <p:spPr>
+          <a:xfrm>
+            <a:off x="9198864" y="3429000"/>
+            <a:ext cx="2167128" cy="1143000"/>
+          </a:xfrm>
+          <a:prstGeom prst="rect">
+            <a:avLst/>
+          </a:prstGeom>
+          <a:noFill/>
+          <a:ln/>
+        </p:spPr>
+        <p:txBody>
+          <a:bodyPr wrap="square" lIns="0" tIns="0" rIns="0" bIns="0" rtlCol="0" anchor="t"/>
+          <a:lstStyle/>
+          <a:p>
+            <a:pPr indent="0" marL="0">
+              <a:spcAft>
+                <a:spcPts val="400"/>
+              </a:spcAft>
+              <a:buNone/>
+            </a:pPr>
+            <a:r>
+              <a:rPr lang="en-US" sz="1500" dirty="0">
+                <a:solidFill>
+                  <a:srgbClr val="A9B4C2"/>
+                </a:solidFill>
+                <a:latin typeface="Calibri" pitchFamily="34" charset="0"/>
+                <a:ea typeface="Calibri" pitchFamily="34" charset="-122"/>
+                <a:cs typeface="Calibri" pitchFamily="34" charset="-120"/>
+              </a:rPr>
+              <a:t>Eksperimen kedua: latih + uji hanya data asli, 5-fold per siklus pity.</a:t>
+            </a:r>
+            <a:endParaRPr lang="en-US" sz="1500" dirty="0"/>
+          </a:p>
+        </p:txBody>
+      </p:sp>
+      <p:sp>
+        <p:nvSpPr>
+          <p:cNvPr id="26" name="Text 24"/>
           <p:cNvSpPr txBox="1"/>
           <p:nvPr/>
         </p:nvSpPr>
@@ -7442,7 +7609,7 @@
                 <a:ea typeface="Calibri" pitchFamily="34" charset="-122"/>
                 <a:cs typeface="Calibri" pitchFamily="34" charset="-120"/>
               </a:rPr>
-              <a:t>Prototipe sudah jalan. Pity akun asli yang dihitung aplikasi sama persis dengan di game. Model pohon &amp; KNN ±91% (simulasi) dan ±93% (data asli).</a:t>
+              <a:t>Prototipe sudah jalan. Pity akun asli yang dihitung aplikasi sama persis dengan di game. Model pohon &amp; KNN ±91% (simulasi) dan ±93% (data asli). Latih di data asli saja: Decision Tree ±93%.</a:t>
             </a:r>
             <a:endParaRPr lang="en-US" sz="1500" dirty="0"/>
           </a:p>

--- a/docs/tugas/UTS_Slide_Kelompok6_A11.4502.pptx
+++ b/docs/tugas/UTS_Slide_Kelompok6_A11.4502.pptx
@@ -2832,16 +2832,40 @@
           </a:p>
         </p:txBody>
       </p:sp>
-      <p:sp>
-        <p:nvSpPr>
-          <p:cNvPr id="5" name="Text 3"/>
+      <p:pic>
+        <p:nvPicPr>
+          <p:cNvPr id="5" name="Image 0" descr="Logo Universitas Dian Nuswantoro">    </p:cNvPr>
+          <p:cNvPicPr>
+            <a:picLocks noChangeAspect="1"/>
+          </p:cNvPicPr>
+          <p:nvPr/>
+        </p:nvPicPr>
+        <p:blipFill>
+          <a:blip r:embed="rId1"/>
+          <a:stretch>
+            <a:fillRect/>
+          </a:stretch>
+        </p:blipFill>
+        <p:spPr>
+          <a:xfrm>
+            <a:off x="548640" y="365760"/>
+            <a:ext cx="914400" cy="914400"/>
+          </a:xfrm>
+          <a:prstGeom prst="rect">
+            <a:avLst/>
+          </a:prstGeom>
+        </p:spPr>
+      </p:pic>
+      <p:sp>
+        <p:nvSpPr>
+          <p:cNvPr id="6" name="Text 3"/>
           <p:cNvSpPr txBox="1"/>
           <p:nvPr/>
         </p:nvSpPr>
         <p:spPr>
           <a:xfrm>
-            <a:off x="548640" y="914400"/>
-            <a:ext cx="7315200" cy="365760"/>
+            <a:off x="1645920" y="640080"/>
+            <a:ext cx="6766560" cy="365760"/>
           </a:xfrm>
           <a:prstGeom prst="rect">
             <a:avLst/>
@@ -2873,7 +2897,7 @@
       </p:sp>
       <p:sp>
         <p:nvSpPr>
-          <p:cNvPr id="6" name="Text 4"/>
+          <p:cNvPr id="7" name="Text 4"/>
           <p:cNvSpPr txBox="1"/>
           <p:nvPr/>
         </p:nvSpPr>
@@ -2912,7 +2936,7 @@
       </p:sp>
       <p:sp>
         <p:nvSpPr>
-          <p:cNvPr id="7" name="Text 5"/>
+          <p:cNvPr id="8" name="Text 5"/>
           <p:cNvSpPr txBox="1"/>
           <p:nvPr/>
         </p:nvSpPr>
@@ -2951,7 +2975,7 @@
       </p:sp>
       <p:sp>
         <p:nvSpPr>
-          <p:cNvPr id="8" name="Text 6"/>
+          <p:cNvPr id="9" name="Text 6"/>
           <p:cNvSpPr txBox="1"/>
           <p:nvPr/>
         </p:nvSpPr>
@@ -3053,7 +3077,7 @@
       </p:sp>
       <p:sp>
         <p:nvSpPr>
-          <p:cNvPr id="9" name="Text 7"/>
+          <p:cNvPr id="10" name="Text 7"/>
           <p:cNvSpPr txBox="1"/>
           <p:nvPr/>
         </p:nvSpPr>

--- a/docs/tugas/UTS_Slide_Kelompok6_A11.4502.pptx
+++ b/docs/tugas/UTS_Slide_Kelompok6_A11.4502.pptx
@@ -363,13 +363,13 @@
                 <c:formatCode>General</c:formatCode>
                 <c:ptCount val="8"/>
                 <c:pt idx="0">
-                  <c:v>86.5</c:v>
+                  <c:v>86.6</c:v>
                 </c:pt>
                 <c:pt idx="1">
                   <c:v>93.5</c:v>
                 </c:pt>
                 <c:pt idx="2">
-                  <c:v>87.7</c:v>
+                  <c:v>87.5</c:v>
                 </c:pt>
                 <c:pt idx="3">
                   <c:v>93.5</c:v>
@@ -1130,7 +1130,7 @@
           <a:p>
             <a:r>
               <a:rPr lang="en-US" dirty="0"/>
-              <a:t>Data (±1,5 menit). Riwayat satu akun terlalu sedikit untuk melatih model, jadi data latih memakai simulasi Monte Carlo dari model Markov, 400 akun. Data asli dua akun, 1.424 baris, sudah memenuhi syarat dataset tabel minimal 500 sampai 1000 baris. Data asli dipakai untuk menguji, dan di eksperimen kedua keenam algoritma juga dilatih dan diuji hanya dengan data asli. Jelaskan cara pengambilan data asli lewat script PowerShell yang hanya membaca cache game, dan bahwa authkey tidak disimpan.</a:t>
+              <a:t>Data (±1,5 menit). Riwayat satu akun terlalu sedikit untuk melatih model, jadi data latih memakai simulasi Monte Carlo dari model Markov, 400 akun. Data asli dua akun, 1.441 pull, sudah memenuhi syarat dataset tabel minimal 500 sampai 1000 baris. Data asli dipakai untuk menguji, dan di eksperimen kedua keenam algoritma juga dilatih dan diuji hanya dengan data asli. Jelaskan cara pengambilan data asli lewat script PowerShell yang hanya membaca cache game, dan bahwa authkey tidak disimpan.</a:t>
             </a:r>
             <a:endParaRPr lang="en-US" dirty="0"/>
           </a:p>
@@ -1306,7 +1306,7 @@
           <a:p>
             <a:r>
               <a:rPr lang="en-US" dirty="0"/>
-              <a:t>Skenario evaluasi (±1 menit). Pembagian data per akun mencegah kebocoran, karena pull yang berurutan saling berkaitan. Cross-validation lima fold untuk hasil yang stabil, lalu uji akhir di data asli. Eksperimen keempat: semua algoritma dilatih dan diuji hanya dengan data asli, 1.192 baris, dibagi per siklus pity menjadi 5 bagian, supaya hasil tidak bergantung pada data simulasi.</a:t>
+              <a:t>Skenario evaluasi (±1 menit). Pembagian data per akun mencegah kebocoran, karena pull yang berurutan saling berkaitan. Cross-validation lima fold untuk hasil yang stabil, lalu uji akhir di data asli. Eksperimen keempat: semua algoritma dilatih dan diuji hanya dengan data asli, 1.209 baris, dibagi per siklus pity menjadi 5 bagian, supaya hasil tidak bergantung pada data simulasi.</a:t>
             </a:r>
             <a:endParaRPr lang="en-US" dirty="0"/>
           </a:p>
@@ -1482,7 +1482,7 @@
           <a:p>
             <a:r>
               <a:rPr lang="en-US" dirty="0"/>
-              <a:t>Hasil awal (±2 menit). Prototipe sudah berjalan dan bisa dibuka di HP. Validasi: pity akun asli 70 dari 90 dan 46 dari 80 sama persis dengan di game. Hasil awal tugas B: model pohon dan KNN sekitar 91 persen di simulasi dan 93 persen di data asli, Logistic Regression dan Naive Bayes lebih rendah. Eksperimen latih dan uji dengan data asli saja, 1.192 baris, juga sudah dilakukan: Decision Tree tetap tertinggi sekitar 93 persen. Hasil lengkap akan dibahas di laporan akhir.</a:t>
+              <a:t>Hasil awal (±2 menit). Prototipe sudah berjalan dan bisa dibuka di HP. Validasi: saat dicek, pity akun asli 70 dari 90 dan 46 dari 80 sama persis dengan di game. Hasil awal tugas B: model pohon dan KNN sekitar 91 persen di simulasi dan 93 persen di data asli, Logistic Regression dan Naive Bayes lebih rendah. Eksperimen latih dan uji dengan data asli saja, 1.209 baris, juga sudah dilakukan: Decision Tree tetap tertinggi sekitar 93 persen. Hasil lengkap akan dibahas di laporan akhir.</a:t>
             </a:r>
             <a:endParaRPr lang="en-US" dirty="0"/>
           </a:p>
@@ -4779,7 +4779,7 @@
                 <a:ea typeface="Calibri" pitchFamily="34" charset="-122"/>
                 <a:cs typeface="Calibri" pitchFamily="34" charset="-120"/>
               </a:rPr>
-              <a:t>1.424 pull · 21 S-Rank · anonim. Dipakai untuk menguji model, dan dalam eksperimen kedua untuk melatih + menguji sendiri (1.192 baris).</a:t>
+              <a:t>1.441 pull · 22 S-Rank · anonim. Dipakai untuk menguji model, dan dalam eksperimen kedua untuk melatih + menguji sendiri (1.209 baris).</a:t>
             </a:r>
             <a:endParaRPr lang="en-US" sz="1600" dirty="0"/>
           </a:p>

--- a/docs/tugas/UTS_Slide_Kelompok6_A11.4502.pptx
+++ b/docs/tugas/UTS_Slide_Kelompok6_A11.4502.pptx
@@ -257,10 +257,10 @@
                   <c:v>91.1</c:v>
                 </c:pt>
                 <c:pt idx="2">
-                  <c:v>85.7</c:v>
+                  <c:v>89.2</c:v>
                 </c:pt>
                 <c:pt idx="3">
-                  <c:v>91.1</c:v>
+                  <c:v>91</c:v>
                 </c:pt>
                 <c:pt idx="4">
                   <c:v>88.9</c:v>
@@ -370,10 +370,10 @@
                   <c:v>93.5</c:v>
                 </c:pt>
                 <c:pt idx="2">
-                  <c:v>87.5</c:v>
+                  <c:v>91.1</c:v>
                 </c:pt>
                 <c:pt idx="3">
-                  <c:v>93.5</c:v>
+                  <c:v>93.1</c:v>
                 </c:pt>
                 <c:pt idx="4">
                   <c:v>91.1</c:v>
@@ -1395,7 +1395,7 @@
           <a:p>
             <a:r>
               <a:rPr lang="en-US" dirty="0"/>
-              <a:t>Skenario evaluasi (±1 menit). Pembagian data per akun mencegah kebocoran, karena pull yang berurutan saling berkaitan. Cross-validation lima fold untuk hasil yang stabil, lalu uji akhir di data asli. Poin keempat adalah eksperimen kedua: semua algoritma dilatih dan diuji hanya dengan data asli, 1.209 baris, dibagi per siklus pity menjadi 5 bagian, supaya hasil tidak bergantung pada data simulasi. Kami tidak memakai oversampling seperti SMOTE, karena yang dicari adalah angka peluang yang tepat; ketidakseimbangan ditangani lewat pilihan metrik.</a:t>
+              <a:t>Skenario evaluasi (±1 menit). Pembagian data per akun mencegah kebocoran, karena pull yang berurutan saling berkaitan. Cross-validation lima fold untuk hasil yang stabil, lalu uji akhir di data asli. Hyperparameter setiap algoritma dipilih dengan grid search memakai 100 akun simulasi tambahan yang tidak dipakai untuk evaluasi, jadi tidak ada kebocoran. Perbedaan antar-model diuji dengan uji t berpasangan terkoreksi, supaya kita tahu selisihnya nyata atau hanya kebetulan. Poin kelima adalah eksperimen kedua: semua algoritma dilatih dan diuji hanya dengan data asli, 1.209 baris, dibagi per siklus pity menjadi 5 bagian, dan grid search diulang di dalam setiap bagian. Kami tidak memakai oversampling seperti SMOTE, karena yang dicari adalah angka peluang yang tepat; ketidakseimbangan ditangani lewat pilihan metrik.</a:t>
             </a:r>
             <a:endParaRPr lang="en-US" dirty="0"/>
           </a:p>
@@ -1571,7 +1571,7 @@
           <a:p>
             <a:r>
               <a:rPr lang="en-US" dirty="0"/>
-              <a:t>Hasil awal (±2 menit). Prototipe sudah berjalan dan bisa dibuka di HP. Validasi: saat dicek, pity akun asli 70 dari 90 dan 46 dari 80 sama persis dengan di game. Hasil awal tugas B: model pohon dan KNN sekitar 91 persen di simulasi dan 93 persen di data asli, Logistic Regression dan Naive Bayes lebih rendah. Eksperimen latih dan uji dengan data asli saja, 1.209 baris, juga sudah dilakukan: Decision Tree tetap tertinggi sekitar 93 persen. Analisis awal data asli memperlihatkan laju S Agent hampir nol sampai pull ke-73 lalu melonjak mulai pull ke-74, sesuai estimasi soft pity. Hasil lengkap akan dibahas di laporan akhir.</a:t>
+              <a:t>Hasil awal (±2 menit). Prototipe sudah berjalan dan bisa dibuka di HP. Validasi: saat dicek, pity akun asli 70 dari 90 dan 46 dari 80 sama persis dengan di game. Hasil awal tugas B: model pohon dan KNN sekitar 91 persen di simulasi dan 93 persen di data asli, Logistic Regression dan Naive Bayes lebih rendah. Eksperimen latih dan uji dengan data asli saja, 1.209 baris, juga sudah dilakukan: Decision Tree tetap tertinggi sekitar 93 persen. Uji coba grid search membuat Naive Bayes dan KNN membaik, dan uji signifikansi awal menunjukkan selisih antaralgoritma di data asli yang masih sedikit belum bermakna. Analisis awal data asli memperlihatkan laju S Agent hampir nol sampai pull ke-73 lalu melonjak mulai pull ke-74, sesuai estimasi soft pity. Hasil lengkap akan dibahas di laporan akhir.</a:t>
             </a:r>
             <a:endParaRPr lang="en-US" dirty="0"/>
           </a:p>
@@ -2451,7 +2451,7 @@
           <a:p>
             <a:r>
               <a:rPr lang="en-US" dirty="0"/>
-              <a:t>Algoritma (±2 menit). Jelaskan singkat keenam algoritma. Naive Bayes, KNN, dan Decision Tree adalah materi kuliah. Logistic Regression sebagai model linear sederhana. Random Forest dan XGBoost adalah ensemble pohon. Ditambah dua pembanding: baseline yang selalu menebak tidak dapat S, dan Markov Chain sebagai acuan teori.</a:t>
+              <a:t>Algoritma (±2 menit). Jelaskan singkat keenam algoritma. Naive Bayes, KNN, dan Decision Tree adalah materi kuliah. Logistic Regression sebagai model linear sederhana. Random Forest dan XGBoost adalah ensemble pohon. Ditambah dua pembanding: baseline yang selalu menebak tidak dapat S, dan Markov Chain sebagai acuan teori. Tekankan bahwa pengaturan setiap algoritma, misalnya jumlah tetangga k pada KNN, tidak ditebak, tetapi dipilih dengan grid search.</a:t>
             </a:r>
             <a:endParaRPr lang="en-US" dirty="0"/>
           </a:p>
@@ -7649,12 +7649,12 @@
         </p:nvSpPr>
         <p:spPr>
           <a:xfrm>
-            <a:off x="548640" y="1828800"/>
-            <a:ext cx="2624328" cy="2926080"/>
+            <a:off x="548640" y="1737360"/>
+            <a:ext cx="2103120" cy="3108960"/>
           </a:xfrm>
           <a:prstGeom prst="roundRect">
             <a:avLst>
-              <a:gd name="adj" fmla="val 2787"/>
+              <a:gd name="adj" fmla="val 3478"/>
             </a:avLst>
           </a:prstGeom>
           <a:solidFill>
@@ -7676,7 +7676,7 @@
         </p:nvSpPr>
         <p:spPr>
           <a:xfrm>
-            <a:off x="777240" y="2057400"/>
+            <a:off x="777240" y="1965960"/>
             <a:ext cx="457200" cy="457200"/>
           </a:xfrm>
           <a:prstGeom prst="ellipse">
@@ -7696,7 +7696,7 @@
         </p:nvSpPr>
         <p:spPr>
           <a:xfrm>
-            <a:off x="777240" y="2057400"/>
+            <a:off x="777240" y="1965960"/>
             <a:ext cx="457200" cy="457200"/>
           </a:xfrm>
           <a:prstGeom prst="rect">
@@ -7735,8 +7735,8 @@
         </p:nvSpPr>
         <p:spPr>
           <a:xfrm>
-            <a:off x="777240" y="2651760"/>
-            <a:ext cx="2167128" cy="731520"/>
+            <a:off x="777240" y="2560320"/>
+            <a:ext cx="1645920" cy="731520"/>
           </a:xfrm>
           <a:prstGeom prst="rect">
             <a:avLst/>
@@ -7752,7 +7752,7 @@
               <a:buNone/>
             </a:pPr>
             <a:r>
-              <a:rPr lang="en-US" sz="1800" b="1" dirty="0">
+              <a:rPr lang="en-US" sz="1700" b="1" dirty="0">
                 <a:solidFill>
                   <a:srgbClr val="E6EDF3"/>
                 </a:solidFill>
@@ -7762,7 +7762,7 @@
               </a:rPr>
               <a:t>Split per akun</a:t>
             </a:r>
-            <a:endParaRPr lang="en-US" sz="1800" dirty="0"/>
+            <a:endParaRPr lang="en-US" sz="1700" dirty="0"/>
           </a:p>
         </p:txBody>
       </p:sp>
@@ -7774,8 +7774,8 @@
         </p:nvSpPr>
         <p:spPr>
           <a:xfrm>
-            <a:off x="777240" y="3429000"/>
-            <a:ext cx="2167128" cy="1143000"/>
+            <a:off x="777240" y="3337560"/>
+            <a:ext cx="1645920" cy="1325880"/>
           </a:xfrm>
           <a:prstGeom prst="rect">
             <a:avLst/>
@@ -7794,7 +7794,7 @@
               <a:buNone/>
             </a:pPr>
             <a:r>
-              <a:rPr lang="en-US" sz="1500" dirty="0">
+              <a:rPr lang="en-US" sz="1400" dirty="0">
                 <a:solidFill>
                   <a:srgbClr val="A9B4C2"/>
                 </a:solidFill>
@@ -7804,7 +7804,7 @@
               </a:rPr>
               <a:t>Pull dari satu akun tidak boleh ada di data latih dan uji sekaligus.</a:t>
             </a:r>
-            <a:endParaRPr lang="en-US" sz="1500" dirty="0"/>
+            <a:endParaRPr lang="en-US" sz="1400" dirty="0"/>
           </a:p>
         </p:txBody>
       </p:sp>
@@ -7816,12 +7816,12 @@
         </p:nvSpPr>
         <p:spPr>
           <a:xfrm>
-            <a:off x="3355848" y="1828800"/>
-            <a:ext cx="2624328" cy="2926080"/>
+            <a:off x="2798064" y="1737360"/>
+            <a:ext cx="2103120" cy="3108960"/>
           </a:xfrm>
           <a:prstGeom prst="roundRect">
             <a:avLst>
-              <a:gd name="adj" fmla="val 2787"/>
+              <a:gd name="adj" fmla="val 3478"/>
             </a:avLst>
           </a:prstGeom>
           <a:solidFill>
@@ -7843,14 +7843,14 @@
         </p:nvSpPr>
         <p:spPr>
           <a:xfrm>
-            <a:off x="3584448" y="2057400"/>
+            <a:off x="3026664" y="1965960"/>
             <a:ext cx="457200" cy="457200"/>
           </a:xfrm>
           <a:prstGeom prst="ellipse">
             <a:avLst/>
           </a:prstGeom>
           <a:solidFill>
-            <a:srgbClr val="58A6FF"/>
+            <a:srgbClr val="FF7EB6"/>
           </a:solidFill>
           <a:ln/>
         </p:spPr>
@@ -7863,7 +7863,7 @@
         </p:nvSpPr>
         <p:spPr>
           <a:xfrm>
-            <a:off x="3584448" y="2057400"/>
+            <a:off x="3026664" y="1965960"/>
             <a:ext cx="457200" cy="457200"/>
           </a:xfrm>
           <a:prstGeom prst="rect">
@@ -7902,8 +7902,8 @@
         </p:nvSpPr>
         <p:spPr>
           <a:xfrm>
-            <a:off x="3584448" y="2651760"/>
-            <a:ext cx="2167128" cy="731520"/>
+            <a:off x="3026664" y="2560320"/>
+            <a:ext cx="1645920" cy="731520"/>
           </a:xfrm>
           <a:prstGeom prst="rect">
             <a:avLst/>
@@ -7919,7 +7919,7 @@
               <a:buNone/>
             </a:pPr>
             <a:r>
-              <a:rPr lang="en-US" sz="1800" b="1" dirty="0">
+              <a:rPr lang="en-US" sz="1700" b="1" dirty="0">
                 <a:solidFill>
                   <a:srgbClr val="E6EDF3"/>
                 </a:solidFill>
@@ -7927,9 +7927,9 @@
                 <a:ea typeface="Cambria" pitchFamily="34" charset="-122"/>
                 <a:cs typeface="Cambria" pitchFamily="34" charset="-120"/>
               </a:rPr>
-              <a:t>5-fold GroupKFold</a:t>
-            </a:r>
-            <a:endParaRPr lang="en-US" sz="1800" dirty="0"/>
+              <a:t>Grid search</a:t>
+            </a:r>
+            <a:endParaRPr lang="en-US" sz="1700" dirty="0"/>
           </a:p>
         </p:txBody>
       </p:sp>
@@ -7941,8 +7941,8 @@
         </p:nvSpPr>
         <p:spPr>
           <a:xfrm>
-            <a:off x="3584448" y="3429000"/>
-            <a:ext cx="2167128" cy="1143000"/>
+            <a:off x="3026664" y="3337560"/>
+            <a:ext cx="1645920" cy="1325880"/>
           </a:xfrm>
           <a:prstGeom prst="rect">
             <a:avLst/>
@@ -7961,7 +7961,7 @@
               <a:buNone/>
             </a:pPr>
             <a:r>
-              <a:rPr lang="en-US" sz="1500" dirty="0">
+              <a:rPr lang="en-US" sz="1400" dirty="0">
                 <a:solidFill>
                   <a:srgbClr val="A9B4C2"/>
                 </a:solidFill>
@@ -7969,9 +7969,9 @@
                 <a:ea typeface="Calibri" pitchFamily="34" charset="-122"/>
                 <a:cs typeface="Calibri" pitchFamily="34" charset="-120"/>
               </a:rPr>
-              <a:t>Rata-rata ± simpangan baku dari 5 percobaan.</a:t>
-            </a:r>
-            <a:endParaRPr lang="en-US" sz="1500" dirty="0"/>
+              <a:t>Hyperparameter dipilih di 100 akun simulasi terpisah (tidak dipakai evaluasi).</a:t>
+            </a:r>
+            <a:endParaRPr lang="en-US" sz="1400" dirty="0"/>
           </a:p>
         </p:txBody>
       </p:sp>
@@ -7983,12 +7983,12 @@
         </p:nvSpPr>
         <p:spPr>
           <a:xfrm>
-            <a:off x="6163056" y="1828800"/>
-            <a:ext cx="2624328" cy="2926080"/>
+            <a:off x="5047488" y="1737360"/>
+            <a:ext cx="2103120" cy="3108960"/>
           </a:xfrm>
           <a:prstGeom prst="roundRect">
             <a:avLst>
-              <a:gd name="adj" fmla="val 2787"/>
+              <a:gd name="adj" fmla="val 3478"/>
             </a:avLst>
           </a:prstGeom>
           <a:solidFill>
@@ -8010,14 +8010,14 @@
         </p:nvSpPr>
         <p:spPr>
           <a:xfrm>
-            <a:off x="6391656" y="2057400"/>
+            <a:off x="5276088" y="1965960"/>
             <a:ext cx="457200" cy="457200"/>
           </a:xfrm>
           <a:prstGeom prst="ellipse">
             <a:avLst/>
           </a:prstGeom>
           <a:solidFill>
-            <a:srgbClr val="3FB950"/>
+            <a:srgbClr val="58A6FF"/>
           </a:solidFill>
           <a:ln/>
         </p:spPr>
@@ -8030,7 +8030,7 @@
         </p:nvSpPr>
         <p:spPr>
           <a:xfrm>
-            <a:off x="6391656" y="2057400"/>
+            <a:off x="5276088" y="1965960"/>
             <a:ext cx="457200" cy="457200"/>
           </a:xfrm>
           <a:prstGeom prst="rect">
@@ -8069,8 +8069,8 @@
         </p:nvSpPr>
         <p:spPr>
           <a:xfrm>
-            <a:off x="6391656" y="2651760"/>
-            <a:ext cx="2167128" cy="731520"/>
+            <a:off x="5276088" y="2560320"/>
+            <a:ext cx="1645920" cy="731520"/>
           </a:xfrm>
           <a:prstGeom prst="rect">
             <a:avLst/>
@@ -8086,7 +8086,7 @@
               <a:buNone/>
             </a:pPr>
             <a:r>
-              <a:rPr lang="en-US" sz="1800" b="1" dirty="0">
+              <a:rPr lang="en-US" sz="1700" b="1" dirty="0">
                 <a:solidFill>
                   <a:srgbClr val="E6EDF3"/>
                 </a:solidFill>
@@ -8094,9 +8094,9 @@
                 <a:ea typeface="Cambria" pitchFamily="34" charset="-122"/>
                 <a:cs typeface="Cambria" pitchFamily="34" charset="-120"/>
               </a:rPr>
-              <a:t>Uji data asli</a:t>
-            </a:r>
-            <a:endParaRPr lang="en-US" sz="1800" dirty="0"/>
+              <a:t>5-fold GroupKFold</a:t>
+            </a:r>
+            <a:endParaRPr lang="en-US" sz="1700" dirty="0"/>
           </a:p>
         </p:txBody>
       </p:sp>
@@ -8108,8 +8108,8 @@
         </p:nvSpPr>
         <p:spPr>
           <a:xfrm>
-            <a:off x="6391656" y="3429000"/>
-            <a:ext cx="2167128" cy="1143000"/>
+            <a:off x="5276088" y="3337560"/>
+            <a:ext cx="1645920" cy="1325880"/>
           </a:xfrm>
           <a:prstGeom prst="rect">
             <a:avLst/>
@@ -8128,7 +8128,7 @@
               <a:buNone/>
             </a:pPr>
             <a:r>
-              <a:rPr lang="en-US" sz="1500" dirty="0">
+              <a:rPr lang="en-US" sz="1400" dirty="0">
                 <a:solidFill>
                   <a:srgbClr val="A9B4C2"/>
                 </a:solidFill>
@@ -8136,9 +8136,9 @@
                 <a:ea typeface="Calibri" pitchFamily="34" charset="-122"/>
                 <a:cs typeface="Calibri" pitchFamily="34" charset="-120"/>
               </a:rPr>
-              <a:t>Model diuji di 2 akun asli yang tidak pernah dilihat saat latih.</a:t>
-            </a:r>
-            <a:endParaRPr lang="en-US" sz="1500" dirty="0"/>
+              <a:t>Rata-rata ± simpangan baku, lalu uji t berpasangan terkoreksi.</a:t>
+            </a:r>
+            <a:endParaRPr lang="en-US" sz="1400" dirty="0"/>
           </a:p>
         </p:txBody>
       </p:sp>
@@ -8150,12 +8150,12 @@
         </p:nvSpPr>
         <p:spPr>
           <a:xfrm>
-            <a:off x="8970264" y="1828800"/>
-            <a:ext cx="2624328" cy="2926080"/>
+            <a:off x="7296912" y="1737360"/>
+            <a:ext cx="2103120" cy="3108960"/>
           </a:xfrm>
           <a:prstGeom prst="roundRect">
             <a:avLst>
-              <a:gd name="adj" fmla="val 2787"/>
+              <a:gd name="adj" fmla="val 3478"/>
             </a:avLst>
           </a:prstGeom>
           <a:solidFill>
@@ -8177,14 +8177,14 @@
         </p:nvSpPr>
         <p:spPr>
           <a:xfrm>
-            <a:off x="9198864" y="2057400"/>
+            <a:off x="7525512" y="1965960"/>
             <a:ext cx="457200" cy="457200"/>
           </a:xfrm>
           <a:prstGeom prst="ellipse">
             <a:avLst/>
           </a:prstGeom>
           <a:solidFill>
-            <a:srgbClr val="BC8CFF"/>
+            <a:srgbClr val="3FB950"/>
           </a:solidFill>
           <a:ln/>
         </p:spPr>
@@ -8197,7 +8197,7 @@
         </p:nvSpPr>
         <p:spPr>
           <a:xfrm>
-            <a:off x="9198864" y="2057400"/>
+            <a:off x="7525512" y="1965960"/>
             <a:ext cx="457200" cy="457200"/>
           </a:xfrm>
           <a:prstGeom prst="rect">
@@ -8236,8 +8236,8 @@
         </p:nvSpPr>
         <p:spPr>
           <a:xfrm>
-            <a:off x="9198864" y="2651760"/>
-            <a:ext cx="2167128" cy="731520"/>
+            <a:off x="7525512" y="2560320"/>
+            <a:ext cx="1645920" cy="731520"/>
           </a:xfrm>
           <a:prstGeom prst="rect">
             <a:avLst/>
@@ -8253,7 +8253,7 @@
               <a:buNone/>
             </a:pPr>
             <a:r>
-              <a:rPr lang="en-US" sz="1800" b="1" dirty="0">
+              <a:rPr lang="en-US" sz="1700" b="1" dirty="0">
                 <a:solidFill>
                   <a:srgbClr val="E6EDF3"/>
                 </a:solidFill>
@@ -8261,9 +8261,9 @@
                 <a:ea typeface="Cambria" pitchFamily="34" charset="-122"/>
                 <a:cs typeface="Cambria" pitchFamily="34" charset="-120"/>
               </a:rPr>
-              <a:t>Latih di data asli</a:t>
-            </a:r>
-            <a:endParaRPr lang="en-US" sz="1800" dirty="0"/>
+              <a:t>Uji data asli</a:t>
+            </a:r>
+            <a:endParaRPr lang="en-US" sz="1700" dirty="0"/>
           </a:p>
         </p:txBody>
       </p:sp>
@@ -8275,8 +8275,8 @@
         </p:nvSpPr>
         <p:spPr>
           <a:xfrm>
-            <a:off x="9198864" y="3429000"/>
-            <a:ext cx="2167128" cy="1143000"/>
+            <a:off x="7525512" y="3337560"/>
+            <a:ext cx="1645920" cy="1325880"/>
           </a:xfrm>
           <a:prstGeom prst="rect">
             <a:avLst/>
@@ -8295,7 +8295,7 @@
               <a:buNone/>
             </a:pPr>
             <a:r>
-              <a:rPr lang="en-US" sz="1500" dirty="0">
+              <a:rPr lang="en-US" sz="1400" dirty="0">
                 <a:solidFill>
                   <a:srgbClr val="A9B4C2"/>
                 </a:solidFill>
@@ -8303,15 +8303,182 @@
                 <a:ea typeface="Calibri" pitchFamily="34" charset="-122"/>
                 <a:cs typeface="Calibri" pitchFamily="34" charset="-120"/>
               </a:rPr>
-              <a:t>Eksperimen kedua: latih + uji hanya data asli, 5-fold per siklus pity.</a:t>
-            </a:r>
-            <a:endParaRPr lang="en-US" sz="1500" dirty="0"/>
-          </a:p>
-        </p:txBody>
-      </p:sp>
-      <p:sp>
-        <p:nvSpPr>
-          <p:cNvPr id="26" name="Text 24"/>
+              <a:t>Model diuji di 2 akun asli yang tidak pernah dilihat saat latih.</a:t>
+            </a:r>
+            <a:endParaRPr lang="en-US" sz="1400" dirty="0"/>
+          </a:p>
+        </p:txBody>
+      </p:sp>
+      <p:sp>
+        <p:nvSpPr>
+          <p:cNvPr id="26" name="Shape 24"/>
+          <p:cNvSpPr/>
+          <p:nvPr/>
+        </p:nvSpPr>
+        <p:spPr>
+          <a:xfrm>
+            <a:off x="9546336" y="1737360"/>
+            <a:ext cx="2103120" cy="3108960"/>
+          </a:xfrm>
+          <a:prstGeom prst="roundRect">
+            <a:avLst>
+              <a:gd name="adj" fmla="val 3478"/>
+            </a:avLst>
+          </a:prstGeom>
+          <a:solidFill>
+            <a:srgbClr val="1C2230"/>
+          </a:solidFill>
+          <a:ln w="9525">
+            <a:solidFill>
+              <a:srgbClr val="30363D"/>
+            </a:solidFill>
+            <a:prstDash val="solid"/>
+          </a:ln>
+        </p:spPr>
+      </p:sp>
+      <p:sp>
+        <p:nvSpPr>
+          <p:cNvPr id="27" name="Shape 25"/>
+          <p:cNvSpPr/>
+          <p:nvPr/>
+        </p:nvSpPr>
+        <p:spPr>
+          <a:xfrm>
+            <a:off x="9774936" y="1965960"/>
+            <a:ext cx="457200" cy="457200"/>
+          </a:xfrm>
+          <a:prstGeom prst="ellipse">
+            <a:avLst/>
+          </a:prstGeom>
+          <a:solidFill>
+            <a:srgbClr val="BC8CFF"/>
+          </a:solidFill>
+          <a:ln/>
+        </p:spPr>
+      </p:sp>
+      <p:sp>
+        <p:nvSpPr>
+          <p:cNvPr id="28" name="Text 26"/>
+          <p:cNvSpPr txBox="1"/>
+          <p:nvPr/>
+        </p:nvSpPr>
+        <p:spPr>
+          <a:xfrm>
+            <a:off x="9774936" y="1965960"/>
+            <a:ext cx="457200" cy="457200"/>
+          </a:xfrm>
+          <a:prstGeom prst="rect">
+            <a:avLst/>
+          </a:prstGeom>
+          <a:noFill/>
+          <a:ln/>
+        </p:spPr>
+        <p:txBody>
+          <a:bodyPr wrap="square" lIns="0" tIns="0" rIns="0" bIns="0" rtlCol="0" anchor="ctr"/>
+          <a:lstStyle/>
+          <a:p>
+            <a:pPr algn="ctr" indent="0" marL="0">
+              <a:buNone/>
+            </a:pPr>
+            <a:r>
+              <a:rPr lang="en-US" sz="1600" b="1" dirty="0">
+                <a:solidFill>
+                  <a:srgbClr val="0E1117"/>
+                </a:solidFill>
+                <a:latin typeface="Calibri" pitchFamily="34" charset="0"/>
+                <a:ea typeface="Calibri" pitchFamily="34" charset="-122"/>
+                <a:cs typeface="Calibri" pitchFamily="34" charset="-120"/>
+              </a:rPr>
+              <a:t>5</a:t>
+            </a:r>
+            <a:endParaRPr lang="en-US" sz="1600" dirty="0"/>
+          </a:p>
+        </p:txBody>
+      </p:sp>
+      <p:sp>
+        <p:nvSpPr>
+          <p:cNvPr id="29" name="Text 27"/>
+          <p:cNvSpPr txBox="1"/>
+          <p:nvPr/>
+        </p:nvSpPr>
+        <p:spPr>
+          <a:xfrm>
+            <a:off x="9774936" y="2560320"/>
+            <a:ext cx="1645920" cy="731520"/>
+          </a:xfrm>
+          <a:prstGeom prst="rect">
+            <a:avLst/>
+          </a:prstGeom>
+          <a:noFill/>
+          <a:ln/>
+        </p:spPr>
+        <p:txBody>
+          <a:bodyPr wrap="square" lIns="0" tIns="0" rIns="0" bIns="0" rtlCol="0" anchor="t"/>
+          <a:lstStyle/>
+          <a:p>
+            <a:pPr indent="0" marL="0">
+              <a:buNone/>
+            </a:pPr>
+            <a:r>
+              <a:rPr lang="en-US" sz="1700" b="1" dirty="0">
+                <a:solidFill>
+                  <a:srgbClr val="E6EDF3"/>
+                </a:solidFill>
+                <a:latin typeface="Cambria" pitchFamily="34" charset="0"/>
+                <a:ea typeface="Cambria" pitchFamily="34" charset="-122"/>
+                <a:cs typeface="Cambria" pitchFamily="34" charset="-120"/>
+              </a:rPr>
+              <a:t>Latih di data asli</a:t>
+            </a:r>
+            <a:endParaRPr lang="en-US" sz="1700" dirty="0"/>
+          </a:p>
+        </p:txBody>
+      </p:sp>
+      <p:sp>
+        <p:nvSpPr>
+          <p:cNvPr id="30" name="Text 28"/>
+          <p:cNvSpPr txBox="1"/>
+          <p:nvPr/>
+        </p:nvSpPr>
+        <p:spPr>
+          <a:xfrm>
+            <a:off x="9774936" y="3337560"/>
+            <a:ext cx="1645920" cy="1325880"/>
+          </a:xfrm>
+          <a:prstGeom prst="rect">
+            <a:avLst/>
+          </a:prstGeom>
+          <a:noFill/>
+          <a:ln/>
+        </p:spPr>
+        <p:txBody>
+          <a:bodyPr wrap="square" lIns="0" tIns="0" rIns="0" bIns="0" rtlCol="0" anchor="t"/>
+          <a:lstStyle/>
+          <a:p>
+            <a:pPr indent="0" marL="0">
+              <a:spcAft>
+                <a:spcPts val="400"/>
+              </a:spcAft>
+              <a:buNone/>
+            </a:pPr>
+            <a:r>
+              <a:rPr lang="en-US" sz="1400" dirty="0">
+                <a:solidFill>
+                  <a:srgbClr val="A9B4C2"/>
+                </a:solidFill>
+                <a:latin typeface="Calibri" pitchFamily="34" charset="0"/>
+                <a:ea typeface="Calibri" pitchFamily="34" charset="-122"/>
+                <a:cs typeface="Calibri" pitchFamily="34" charset="-120"/>
+              </a:rPr>
+              <a:t>Latih + uji hanya data asli, 5-fold per siklus pity, nested grid search.</a:t>
+            </a:r>
+            <a:endParaRPr lang="en-US" sz="1400" dirty="0"/>
+          </a:p>
+        </p:txBody>
+      </p:sp>
+      <p:sp>
+        <p:nvSpPr>
+          <p:cNvPr id="31" name="Text 29"/>
           <p:cNvSpPr txBox="1"/>
           <p:nvPr/>
         </p:nvSpPr>
@@ -18709,12 +18876,12 @@
         </p:nvSpPr>
         <p:spPr>
           <a:xfrm>
-            <a:off x="548640" y="1645920"/>
-            <a:ext cx="3566160" cy="2057400"/>
+            <a:off x="548640" y="1554480"/>
+            <a:ext cx="3566160" cy="1828800"/>
           </a:xfrm>
           <a:prstGeom prst="roundRect">
             <a:avLst>
-              <a:gd name="adj" fmla="val 3556"/>
+              <a:gd name="adj" fmla="val 4000"/>
             </a:avLst>
           </a:prstGeom>
           <a:solidFill>
@@ -18736,7 +18903,7 @@
         </p:nvSpPr>
         <p:spPr>
           <a:xfrm>
-            <a:off x="777240" y="1874520"/>
+            <a:off x="777240" y="1783080"/>
             <a:ext cx="3108960" cy="411480"/>
           </a:xfrm>
           <a:prstGeom prst="rect">
@@ -18775,8 +18942,8 @@
         </p:nvSpPr>
         <p:spPr>
           <a:xfrm>
-            <a:off x="777240" y="2331720"/>
-            <a:ext cx="3108960" cy="1188720"/>
+            <a:off x="777240" y="2240280"/>
+            <a:ext cx="3108960" cy="960120"/>
           </a:xfrm>
           <a:prstGeom prst="rect">
             <a:avLst/>
@@ -18817,12 +18984,12 @@
         </p:nvSpPr>
         <p:spPr>
           <a:xfrm>
-            <a:off x="4297680" y="1645920"/>
-            <a:ext cx="3566160" cy="2057400"/>
+            <a:off x="4297680" y="1554480"/>
+            <a:ext cx="3566160" cy="1828800"/>
           </a:xfrm>
           <a:prstGeom prst="roundRect">
             <a:avLst>
-              <a:gd name="adj" fmla="val 3556"/>
+              <a:gd name="adj" fmla="val 4000"/>
             </a:avLst>
           </a:prstGeom>
           <a:solidFill>
@@ -18844,7 +19011,7 @@
         </p:nvSpPr>
         <p:spPr>
           <a:xfrm>
-            <a:off x="4526280" y="1874520"/>
+            <a:off x="4526280" y="1783080"/>
             <a:ext cx="3108960" cy="411480"/>
           </a:xfrm>
           <a:prstGeom prst="rect">
@@ -18883,8 +19050,8 @@
         </p:nvSpPr>
         <p:spPr>
           <a:xfrm>
-            <a:off x="4526280" y="2331720"/>
-            <a:ext cx="3108960" cy="1188720"/>
+            <a:off x="4526280" y="2240280"/>
+            <a:ext cx="3108960" cy="960120"/>
           </a:xfrm>
           <a:prstGeom prst="rect">
             <a:avLst/>
@@ -18911,7 +19078,7 @@
                 <a:ea typeface="Calibri" pitchFamily="34" charset="-122"/>
                 <a:cs typeface="Calibri" pitchFamily="34" charset="-120"/>
               </a:rPr>
-              <a:t>Menebak dari 101 data latih terdekat (fitur dinormalisasi).</a:t>
+              <a:t>Menebak dari k data latih terdekat (fitur dinormalisasi).</a:t>
             </a:r>
             <a:endParaRPr lang="en-US" sz="1500" dirty="0"/>
           </a:p>
@@ -18925,12 +19092,12 @@
         </p:nvSpPr>
         <p:spPr>
           <a:xfrm>
-            <a:off x="8046720" y="1645920"/>
-            <a:ext cx="3566160" cy="2057400"/>
+            <a:off x="8046720" y="1554480"/>
+            <a:ext cx="3566160" cy="1828800"/>
           </a:xfrm>
           <a:prstGeom prst="roundRect">
             <a:avLst>
-              <a:gd name="adj" fmla="val 3556"/>
+              <a:gd name="adj" fmla="val 4000"/>
             </a:avLst>
           </a:prstGeom>
           <a:solidFill>
@@ -18952,7 +19119,7 @@
         </p:nvSpPr>
         <p:spPr>
           <a:xfrm>
-            <a:off x="8275320" y="1874520"/>
+            <a:off x="8275320" y="1783080"/>
             <a:ext cx="3108960" cy="411480"/>
           </a:xfrm>
           <a:prstGeom prst="rect">
@@ -18991,8 +19158,8 @@
         </p:nvSpPr>
         <p:spPr>
           <a:xfrm>
-            <a:off x="8275320" y="2331720"/>
-            <a:ext cx="3108960" cy="1188720"/>
+            <a:off x="8275320" y="2240280"/>
+            <a:ext cx="3108960" cy="960120"/>
           </a:xfrm>
           <a:prstGeom prst="rect">
             <a:avLst/>
@@ -19033,12 +19200,12 @@
         </p:nvSpPr>
         <p:spPr>
           <a:xfrm>
-            <a:off x="548640" y="3886200"/>
-            <a:ext cx="3566160" cy="2057400"/>
+            <a:off x="548640" y="3566160"/>
+            <a:ext cx="3566160" cy="1828800"/>
           </a:xfrm>
           <a:prstGeom prst="roundRect">
             <a:avLst>
-              <a:gd name="adj" fmla="val 3556"/>
+              <a:gd name="adj" fmla="val 4000"/>
             </a:avLst>
           </a:prstGeom>
           <a:solidFill>
@@ -19060,7 +19227,7 @@
         </p:nvSpPr>
         <p:spPr>
           <a:xfrm>
-            <a:off x="777240" y="4114800"/>
+            <a:off x="777240" y="3794760"/>
             <a:ext cx="3108960" cy="411480"/>
           </a:xfrm>
           <a:prstGeom prst="rect">
@@ -19099,8 +19266,8 @@
         </p:nvSpPr>
         <p:spPr>
           <a:xfrm>
-            <a:off x="777240" y="4572000"/>
-            <a:ext cx="3108960" cy="1188720"/>
+            <a:off x="777240" y="4251960"/>
+            <a:ext cx="3108960" cy="960120"/>
           </a:xfrm>
           <a:prstGeom prst="rect">
             <a:avLst/>
@@ -19127,7 +19294,7 @@
                 <a:ea typeface="Calibri" pitchFamily="34" charset="-122"/>
                 <a:cs typeface="Calibri" pitchFamily="34" charset="-120"/>
               </a:rPr>
-              <a:t>Aturan jika–maka yang mudah dibaca (max depth 6).</a:t>
+              <a:t>Aturan jika–maka yang mudah dibaca manusia.</a:t>
             </a:r>
             <a:endParaRPr lang="en-US" sz="1500" dirty="0"/>
           </a:p>
@@ -19141,12 +19308,12 @@
         </p:nvSpPr>
         <p:spPr>
           <a:xfrm>
-            <a:off x="4297680" y="3886200"/>
-            <a:ext cx="3566160" cy="2057400"/>
+            <a:off x="4297680" y="3566160"/>
+            <a:ext cx="3566160" cy="1828800"/>
           </a:xfrm>
           <a:prstGeom prst="roundRect">
             <a:avLst>
-              <a:gd name="adj" fmla="val 3556"/>
+              <a:gd name="adj" fmla="val 4000"/>
             </a:avLst>
           </a:prstGeom>
           <a:solidFill>
@@ -19168,7 +19335,7 @@
         </p:nvSpPr>
         <p:spPr>
           <a:xfrm>
-            <a:off x="4526280" y="4114800"/>
+            <a:off x="4526280" y="3794760"/>
             <a:ext cx="3108960" cy="411480"/>
           </a:xfrm>
           <a:prstGeom prst="rect">
@@ -19207,8 +19374,8 @@
         </p:nvSpPr>
         <p:spPr>
           <a:xfrm>
-            <a:off x="4526280" y="4572000"/>
-            <a:ext cx="3108960" cy="1188720"/>
+            <a:off x="4526280" y="4251960"/>
+            <a:ext cx="3108960" cy="960120"/>
           </a:xfrm>
           <a:prstGeom prst="rect">
             <a:avLst/>
@@ -19249,12 +19416,12 @@
         </p:nvSpPr>
         <p:spPr>
           <a:xfrm>
-            <a:off x="8046720" y="3886200"/>
-            <a:ext cx="3566160" cy="2057400"/>
+            <a:off x="8046720" y="3566160"/>
+            <a:ext cx="3566160" cy="1828800"/>
           </a:xfrm>
           <a:prstGeom prst="roundRect">
             <a:avLst>
-              <a:gd name="adj" fmla="val 3556"/>
+              <a:gd name="adj" fmla="val 4000"/>
             </a:avLst>
           </a:prstGeom>
           <a:solidFill>
@@ -19276,7 +19443,7 @@
         </p:nvSpPr>
         <p:spPr>
           <a:xfrm>
-            <a:off x="8275320" y="4114800"/>
+            <a:off x="8275320" y="3794760"/>
             <a:ext cx="3108960" cy="411480"/>
           </a:xfrm>
           <a:prstGeom prst="rect">
@@ -19315,8 +19482,8 @@
         </p:nvSpPr>
         <p:spPr>
           <a:xfrm>
-            <a:off x="8275320" y="4572000"/>
-            <a:ext cx="3108960" cy="1188720"/>
+            <a:off x="8275320" y="4251960"/>
+            <a:ext cx="3108960" cy="960120"/>
           </a:xfrm>
           <a:prstGeom prst="rect">
             <a:avLst/>
@@ -19344,6 +19511,45 @@
                 <a:cs typeface="Calibri" pitchFamily="34" charset="-120"/>
               </a:rPr>
               <a:t>300 pohon berurutan memperbaiki kesalahan (boosting).</a:t>
+            </a:r>
+            <a:endParaRPr lang="en-US" sz="1500" dirty="0"/>
+          </a:p>
+        </p:txBody>
+      </p:sp>
+      <p:sp>
+        <p:nvSpPr>
+          <p:cNvPr id="24" name="Text 22"/>
+          <p:cNvSpPr txBox="1"/>
+          <p:nvPr/>
+        </p:nvSpPr>
+        <p:spPr>
+          <a:xfrm>
+            <a:off x="548640" y="5669280"/>
+            <a:ext cx="11064240" cy="457200"/>
+          </a:xfrm>
+          <a:prstGeom prst="rect">
+            <a:avLst/>
+          </a:prstGeom>
+          <a:noFill/>
+          <a:ln/>
+        </p:spPr>
+        <p:txBody>
+          <a:bodyPr wrap="square" lIns="0" tIns="0" rIns="0" bIns="0" rtlCol="0" anchor="ctr"/>
+          <a:lstStyle/>
+          <a:p>
+            <a:pPr indent="0" marL="0">
+              <a:buNone/>
+            </a:pPr>
+            <a:r>
+              <a:rPr lang="en-US" sz="1500" dirty="0">
+                <a:solidFill>
+                  <a:srgbClr val="A9B4C2"/>
+                </a:solidFill>
+                <a:latin typeface="Calibri" pitchFamily="34" charset="0"/>
+                <a:ea typeface="Calibri" pitchFamily="34" charset="-122"/>
+                <a:cs typeface="Calibri" pitchFamily="34" charset="-120"/>
+              </a:rPr>
+              <a:t>Hyperparameter (k, var_smoothing, C, kedalaman pohon, learning rate) dipilih dengan grid search, bukan ditebak.</a:t>
             </a:r>
             <a:endParaRPr lang="en-US" sz="1500" dirty="0"/>
           </a:p>

--- a/docs/tugas/UTS_Slide_Kelompok6_A11.4502.pptx
+++ b/docs/tugas/UTS_Slide_Kelompok6_A11.4502.pptx
@@ -287,7 +287,7 @@
               <c:strCache>
                 <c:ptCount val="1"/>
                 <c:pt idx="0">
-                  <c:v>Data asli (2 akun)</c:v>
+                  <c:v>Data asli (3 akun)</c:v>
                 </c:pt>
               </c:strCache>
             </c:strRef>
@@ -364,28 +364,28 @@
                 <c:formatCode>General</c:formatCode>
                 <c:ptCount val="8"/>
                 <c:pt idx="0">
-                  <c:v>86.6</c:v>
+                  <c:v>86.5</c:v>
                 </c:pt>
                 <c:pt idx="1">
-                  <c:v>93.5</c:v>
+                  <c:v>92.6</c:v>
                 </c:pt>
                 <c:pt idx="2">
-                  <c:v>91.1</c:v>
+                  <c:v>90.7</c:v>
                 </c:pt>
                 <c:pt idx="3">
-                  <c:v>93.1</c:v>
+                  <c:v>92.3</c:v>
                 </c:pt>
                 <c:pt idx="4">
-                  <c:v>91.1</c:v>
+                  <c:v>90.3</c:v>
                 </c:pt>
                 <c:pt idx="5">
-                  <c:v>93.3</c:v>
+                  <c:v>92.4</c:v>
                 </c:pt>
                 <c:pt idx="6">
-                  <c:v>93.3</c:v>
+                  <c:v>92.4</c:v>
                 </c:pt>
                 <c:pt idx="7">
-                  <c:v>93.4</c:v>
+                  <c:v>92.5</c:v>
                 </c:pt>
               </c:numCache>
             </c:numRef>
@@ -1219,7 +1219,7 @@
           <a:p>
             <a:r>
               <a:rPr lang="en-US" dirty="0"/>
-              <a:t>Data (±1,5 menit). Riwayat satu akun terlalu sedikit untuk melatih model, jadi data latih memakai simulasi Monte Carlo dari model Markov, 400 akun. Karena simulasi dibuat dari model kami sendiri, model yang dilatih di simulasi hanya mempelajari ulang asumsi itu; karena itu data asli sangat penting. Data asli dua akun, 1.441 pull, sudah memenuhi syarat dataset tabel minimal 500 sampai 1000 baris. Data asli dipakai untuk menguji, dan di eksperimen kedua keenam algoritma juga dilatih dan diuji hanya dengan data asli. Jelaskan cara pengambilan data asli lewat script PowerShell yang hanya membaca cache game, dan bahwa authkey tidak disimpan.</a:t>
+              <a:t>Data (±1,5 menit). Riwayat satu akun terlalu sedikit untuk melatih model, jadi data latih memakai simulasi Monte Carlo dari model Markov, 400 akun. Karena simulasi dibuat dari model kami sendiri, model yang dilatih di simulasi hanya mempelajari ulang asumsi itu; karena itu data asli sangat penting. Data asli tiga akun, 1.751 pull, sudah memenuhi syarat dataset tabel minimal 500 sampai 1000 baris. Data asli dipakai untuk menguji, dan di eksperimen kedua keenam algoritma juga dilatih dan diuji hanya dengan data asli. Jelaskan cara pengambilan data asli lewat script PowerShell yang hanya membaca cache game, dan bahwa authkey tidak disimpan.</a:t>
             </a:r>
             <a:endParaRPr lang="en-US" dirty="0"/>
           </a:p>
@@ -1395,7 +1395,7 @@
           <a:p>
             <a:r>
               <a:rPr lang="en-US" dirty="0"/>
-              <a:t>Skenario evaluasi (±1 menit). Pembagian data per akun mencegah kebocoran, karena pull yang berurutan saling berkaitan. Cross-validation lima fold untuk hasil yang stabil, lalu uji akhir di data asli. Hyperparameter setiap algoritma dipilih dengan grid search memakai 100 akun simulasi tambahan yang tidak dipakai untuk evaluasi, jadi tidak ada kebocoran. Perbedaan antar-model diuji dengan uji t berpasangan terkoreksi, supaya kita tahu selisihnya nyata atau hanya kebetulan. Poin kelima adalah eksperimen kedua: semua algoritma dilatih dan diuji hanya dengan data asli, 1.209 baris, dibagi per siklus pity menjadi 5 bagian, dan grid search diulang di dalam setiap bagian. Kami tidak memakai oversampling seperti SMOTE, karena yang dicari adalah angka peluang yang tepat; ketidakseimbangan ditangani lewat pilihan metrik.</a:t>
+              <a:t>Skenario evaluasi (±1 menit). Pembagian data per akun mencegah kebocoran, karena pull yang berurutan saling berkaitan. Cross-validation lima fold untuk hasil yang stabil, lalu uji akhir di data asli. Hyperparameter setiap algoritma dipilih dengan grid search memakai 100 akun simulasi tambahan yang tidak dipakai untuk evaluasi, jadi tidak ada kebocoran. Perbedaan antar-model diuji dengan uji t berpasangan terkoreksi, supaya kita tahu selisihnya nyata atau hanya kebetulan. Poin kelima adalah eksperimen kedua: semua algoritma dilatih dan diuji hanya dengan data asli, 1.425 baris, dibagi per siklus pity menjadi 5 bagian, dan grid search diulang di dalam setiap bagian. Kami tidak memakai oversampling seperti SMOTE, karena yang dicari adalah angka peluang yang tepat; ketidakseimbangan ditangani lewat pilihan metrik.</a:t>
             </a:r>
             <a:endParaRPr lang="en-US" dirty="0"/>
           </a:p>
@@ -1571,7 +1571,7 @@
           <a:p>
             <a:r>
               <a:rPr lang="en-US" dirty="0"/>
-              <a:t>Hasil awal (±2 menit). Prototipe sudah berjalan dan bisa dibuka di HP. Validasi: saat dicek, pity akun asli 70 dari 90 dan 46 dari 80 sama persis dengan di game. Hasil awal tugas B: model pohon dan KNN sekitar 91 persen di simulasi dan 93 persen di data asli, Logistic Regression dan Naive Bayes lebih rendah. Eksperimen latih dan uji dengan data asli saja, 1.209 baris, juga sudah dilakukan: Decision Tree tetap tertinggi sekitar 93 persen. Uji coba grid search membuat Naive Bayes dan KNN membaik, dan uji signifikansi awal menunjukkan selisih antaralgoritma di data asli yang masih sedikit belum bermakna. Analisis awal data asli memperlihatkan laju S Agent hampir nol sampai pull ke-73 lalu melonjak mulai pull ke-74, sesuai estimasi soft pity. Hasil lengkap akan dibahas di laporan akhir.</a:t>
+              <a:t>Hasil awal (±2 menit). Prototipe sudah berjalan dan bisa dibuka di HP. Validasi: saat dicek, pity akun asli 70 dari 90 dan 46 dari 80 sama persis dengan di game. Hasil awal tugas B: model pohon dan KNN sekitar 91 persen di simulasi dan 92 persen di data asli, Logistic Regression dan Naive Bayes lebih rendah. Eksperimen latih dan uji dengan data asli saja, 1.425 baris, juga sudah dilakukan: Random Forest tertinggi sekitar 92 persen. Uji coba grid search membuat Naive Bayes membaik, dan uji signifikansi awal menunjukkan selisih antaralgoritma di data asli yang masih sedikit belum bermakna. Analisis awal data asli memperlihatkan laju S Agent hampir nol sampai pull ke-73 lalu melonjak mulai pull ke-74, sesuai estimasi soft pity. Hasil lengkap akan dibahas di laporan akhir.</a:t>
             </a:r>
             <a:endParaRPr lang="en-US" dirty="0"/>
           </a:p>
@@ -6118,7 +6118,7 @@
                 <a:ea typeface="Cambria" pitchFamily="34" charset="-122"/>
                 <a:cs typeface="Cambria" pitchFamily="34" charset="-120"/>
               </a:rPr>
-              <a:t>Data asli (2 akun)</a:t>
+              <a:t>Data asli (3 akun)</a:t>
             </a:r>
             <a:endParaRPr lang="en-US" sz="1800" dirty="0"/>
           </a:p>
@@ -6160,7 +6160,7 @@
                 <a:ea typeface="Calibri" pitchFamily="34" charset="-122"/>
                 <a:cs typeface="Calibri" pitchFamily="34" charset="-120"/>
               </a:rPr>
-              <a:t>1.441 pull · 22 S-Rank · anonim. Dipakai untuk menguji model, memeriksa pola soft pity, dan melatih + menguji sendiri (1.209 baris).</a:t>
+              <a:t>1.751 pull · 28 S-Rank · anonim. Dipakai untuk menguji model, memeriksa pola soft pity, dan melatih + menguji sendiri (1.425 baris).</a:t>
             </a:r>
             <a:endParaRPr lang="en-US" sz="1600" dirty="0"/>
           </a:p>
@@ -8303,7 +8303,7 @@
                 <a:ea typeface="Calibri" pitchFamily="34" charset="-122"/>
                 <a:cs typeface="Calibri" pitchFamily="34" charset="-120"/>
               </a:rPr>
-              <a:t>Model diuji di 2 akun asli yang tidak pernah dilihat saat latih.</a:t>
+              <a:t>Model diuji di 3 akun asli yang tidak pernah dilihat saat latih.</a:t>
             </a:r>
             <a:endParaRPr lang="en-US" sz="1400" dirty="0"/>
           </a:p>
@@ -9181,7 +9181,7 @@
                 <a:ea typeface="Calibri" pitchFamily="34" charset="-122"/>
                 <a:cs typeface="Calibri" pitchFamily="34" charset="-120"/>
               </a:rPr>
-              <a:t>Prototipe sudah jalan; pity akun asli sama dengan di game. Model pohon &amp; KNN ±91% (simulasi) dan ±93% (data asli). Data asli juga memperlihatkan lonjakan S Agent mulai pull ke-74, sesuai estimasi soft pity.</a:t>
+              <a:t>Prototipe sudah jalan; pity akun asli sama dengan di game. Model pohon &amp; KNN ±91% (simulasi) dan ±92% (data asli). Data asli juga memperlihatkan lonjakan S Agent mulai pull ke-74, sesuai estimasi soft pity.</a:t>
             </a:r>
             <a:endParaRPr lang="en-US" sz="1500" dirty="0"/>
           </a:p>

--- a/docs/tugas/UTS_Slide_Kelompok6_A11.4502.pptx
+++ b/docs/tugas/UTS_Slide_Kelompok6_A11.4502.pptx
@@ -10347,8 +10347,8 @@
         </p:nvSpPr>
         <p:spPr>
           <a:xfrm>
-            <a:off x="1773936" y="1444752"/>
-            <a:ext cx="8613648" cy="4882896"/>
+            <a:off x="590140" y="1444752"/>
+            <a:ext cx="10981241" cy="4882896"/>
           </a:xfrm>
           <a:prstGeom prst="roundRect">
             <a:avLst>
@@ -10382,8 +10382,8 @@
         </p:blipFill>
         <p:spPr>
           <a:xfrm>
-            <a:off x="1883664" y="1554480"/>
-            <a:ext cx="8394192" cy="4663440"/>
+            <a:off x="699868" y="1554480"/>
+            <a:ext cx="10761785" cy="4663440"/>
           </a:xfrm>
           <a:prstGeom prst="rect">
             <a:avLst/>

--- a/docs/tugas/UTS_Slide_Kelompok6_A11.4502.pptx
+++ b/docs/tugas/UTS_Slide_Kelompok6_A11.4502.pptx
@@ -10828,9 +10828,9 @@
             <a:tbl>
               <a:tblPr/>
               <a:tblGrid>
-                <a:gridCol w="2194560"/>
-                <a:gridCol w="3108960"/>
-                <a:gridCol w="5760720"/>
+                <a:gridCol w="2011680"/>
+                <a:gridCol w="3383280"/>
+                <a:gridCol w="5669280"/>
               </a:tblGrid>
               <a:tr h="566928">
                 <a:tc>
@@ -11330,7 +11330,7 @@
                           <a:ea typeface="Calibri" pitchFamily="34" charset="-122"/>
                           <a:cs typeface="Calibri" pitchFamily="34" charset="-120"/>
                         </a:rPr>
-                        <a:t>Dafi Hauzan A.H</a:t>
+                        <a:t>Dafi Hauzan Atsillah Hoenarko</a:t>
                       </a:r>
                       <a:endParaRPr lang="en-US" sz="1500" dirty="0">
                         <a:latin typeface="Calibri" charset="0"/>
@@ -11536,7 +11536,7 @@
                           <a:ea typeface="Calibri" pitchFamily="34" charset="-122"/>
                           <a:cs typeface="Calibri" pitchFamily="34" charset="-120"/>
                         </a:rPr>
-                        <a:t>Gastiadirrijal Rafi M</a:t>
+                        <a:t>Gastiadirrijal Rafi Maulana</a:t>
                       </a:r>
                       <a:endParaRPr lang="en-US" sz="1500" dirty="0">
                         <a:latin typeface="Calibri" charset="0"/>
@@ -11742,7 +11742,7 @@
                           <a:ea typeface="Calibri" pitchFamily="34" charset="-122"/>
                           <a:cs typeface="Calibri" pitchFamily="34" charset="-120"/>
                         </a:rPr>
-                        <a:t>Zabrina Miftah Z</a:t>
+                        <a:t>Zabrina Miftah Zulaikha</a:t>
                       </a:r>
                       <a:endParaRPr lang="en-US" sz="1500" dirty="0">
                         <a:latin typeface="Calibri" charset="0"/>
